--- a/Day4/markov/next_word_prediction.pptx
+++ b/Day4/markov/next_word_prediction.pptx
@@ -3206,14 +3206,14 @@
           <a:p>
             <a:r>
               <a:rPr lang="en-US"/>
-              <a:t>Do the know what they are doing ?</a:t>
+              <a:t>Do they know what they are doing ?</a:t>
             </a:r>
             <a:endParaRPr lang="en-US"/>
           </a:p>
           <a:p>
             <a:r>
               <a:rPr lang="en-US"/>
-              <a:t>How do LLMs that power inteligenet agents work ?</a:t>
+              <a:t>How do LLMs that power intelligent agents work ?</a:t>
             </a:r>
             <a:endParaRPr lang="en-US"/>
           </a:p>
@@ -3230,7 +3230,7 @@
           <a:p>
             <a:r>
               <a:rPr lang="en-US"/>
-              <a:t>We’ll use a markov matrix as a tool / proxy to gain an intution about how LLMs work</a:t>
+              <a:t>We’ll use a markov matrix as a tool / proxy to gain an intuition about how LLMs work</a:t>
             </a:r>
             <a:endParaRPr lang="en-US"/>
           </a:p>
@@ -4328,10 +4328,6 @@
                       <a:pPr>
                         <a:buNone/>
                       </a:pPr>
-                      <a:r>
-                        <a:rPr lang="en-US"/>
-                        <a:t>1</a:t>
-                      </a:r>
                       <a:endParaRPr lang="en-US"/>
                     </a:p>
                   </a:txBody>
@@ -4416,10 +4412,6 @@
                       <a:pPr>
                         <a:buNone/>
                       </a:pPr>
-                      <a:r>
-                        <a:rPr lang="en-US"/>
-                        <a:t>2</a:t>
-                      </a:r>
                       <a:endParaRPr lang="en-US"/>
                     </a:p>
                   </a:txBody>
@@ -4432,10 +4424,6 @@
                       <a:pPr>
                         <a:buNone/>
                       </a:pPr>
-                      <a:r>
-                        <a:rPr lang="en-US"/>
-                        <a:t>1</a:t>
-                      </a:r>
                       <a:endParaRPr lang="en-US"/>
                     </a:p>
                   </a:txBody>
@@ -4484,10 +4472,6 @@
                       <a:pPr>
                         <a:buNone/>
                       </a:pPr>
-                      <a:r>
-                        <a:rPr lang="en-US"/>
-                        <a:t>1</a:t>
-                      </a:r>
                       <a:endParaRPr lang="en-US"/>
                     </a:p>
                   </a:txBody>
@@ -4560,10 +4544,6 @@
                       <a:pPr>
                         <a:buNone/>
                       </a:pPr>
-                      <a:r>
-                        <a:rPr lang="en-US"/>
-                        <a:t>1</a:t>
-                      </a:r>
                       <a:endParaRPr lang="en-US"/>
                     </a:p>
                   </a:txBody>
@@ -4765,10 +4745,6 @@
                       <a:pPr>
                         <a:buNone/>
                       </a:pPr>
-                      <a:r>
-                        <a:rPr lang="en-US"/>
-                        <a:t>1</a:t>
-                      </a:r>
                       <a:endParaRPr lang="en-US"/>
                     </a:p>
                   </a:txBody>
@@ -4853,10 +4829,6 @@
                       <a:pPr>
                         <a:buNone/>
                       </a:pPr>
-                      <a:r>
-                        <a:rPr lang="en-US"/>
-                        <a:t>0.66</a:t>
-                      </a:r>
                       <a:endParaRPr lang="en-US"/>
                     </a:p>
                   </a:txBody>
@@ -4869,10 +4841,6 @@
                       <a:pPr>
                         <a:buNone/>
                       </a:pPr>
-                      <a:r>
-                        <a:rPr lang="en-US"/>
-                        <a:t>0.33</a:t>
-                      </a:r>
                       <a:endParaRPr lang="en-US"/>
                     </a:p>
                   </a:txBody>
@@ -4921,10 +4889,6 @@
                       <a:pPr>
                         <a:buNone/>
                       </a:pPr>
-                      <a:r>
-                        <a:rPr lang="en-US"/>
-                        <a:t>1</a:t>
-                      </a:r>
                       <a:endParaRPr lang="en-US"/>
                     </a:p>
                   </a:txBody>
@@ -4997,10 +4961,6 @@
                       <a:pPr>
                         <a:buNone/>
                       </a:pPr>
-                      <a:r>
-                        <a:rPr lang="en-US"/>
-                        <a:t>1</a:t>
-                      </a:r>
                       <a:endParaRPr lang="en-US"/>
                     </a:p>
                   </a:txBody>

--- a/Day4/markov/next_word_prediction.pptx
+++ b/Day4/markov/next_word_prediction.pptx
@@ -3103,7 +3103,7 @@
           <a:p>
             <a:r>
               <a:rPr lang="en-US"/>
-              <a:t>Markov Matrices</a:t>
+              <a:t>How LLMs work ?</a:t>
             </a:r>
             <a:endParaRPr lang="en-US"/>
           </a:p>
@@ -3128,7 +3128,7 @@
           <a:p>
             <a:r>
               <a:rPr lang="en-US"/>
-              <a:t>Next Word Prediction</a:t>
+              <a:t>Gaining an intution </a:t>
             </a:r>
             <a:endParaRPr lang="en-US"/>
           </a:p>
@@ -3230,7 +3230,36 @@
           <a:p>
             <a:r>
               <a:rPr lang="en-US"/>
-              <a:t>We’ll use a markov matrix as a tool / proxy to gain an intuition about how LLMs work</a:t>
+              <a:t>LLMs are complex neural networks</a:t>
+            </a:r>
+            <a:endParaRPr lang="en-US"/>
+          </a:p>
+          <a:p>
+            <a:pPr lvl="1"/>
+            <a:r>
+              <a:rPr lang="en-US"/>
+              <a:t>Given a sequence of words (context), they excel at predicting the next word(s)</a:t>
+            </a:r>
+            <a:endParaRPr lang="en-US"/>
+          </a:p>
+          <a:p>
+            <a:pPr lvl="2"/>
+            <a:r>
+              <a:rPr lang="en-US" i="1">
+                <a:latin typeface="Arial Italic" panose="020B0604020202090204" charset="0"/>
+                <a:cs typeface="Arial Italic" panose="020B0604020202090204" charset="0"/>
+              </a:rPr>
+              <a:t>P(next word | previous words in sequence)</a:t>
+            </a:r>
+            <a:endParaRPr lang="en-US" i="1">
+              <a:latin typeface="Arial Italic" panose="020B0604020202090204" charset="0"/>
+              <a:cs typeface="Arial Italic" panose="020B0604020202090204" charset="0"/>
+            </a:endParaRPr>
+          </a:p>
+          <a:p>
+            <a:r>
+              <a:rPr lang="en-US"/>
+              <a:t>We’ll use markov chains as a tool to gain an intuition about how LLMs work</a:t>
             </a:r>
             <a:endParaRPr lang="en-US"/>
           </a:p>
@@ -3497,6 +3526,153 @@
                       </p:childTnLst>
                     </p:cTn>
                   </p:par>
+                  <p:par>
+                    <p:cTn id="23" fill="hold">
+                      <p:stCondLst>
+                        <p:cond delay="indefinite"/>
+                      </p:stCondLst>
+                      <p:childTnLst>
+                        <p:par>
+                          <p:cTn id="24" fill="hold">
+                            <p:stCondLst>
+                              <p:cond delay="0"/>
+                            </p:stCondLst>
+                            <p:childTnLst>
+                              <p:par>
+                                <p:cTn id="25" presetID="1" presetClass="entr" presetSubtype="0" fill="hold" nodeType="clickEffect">
+                                  <p:stCondLst>
+                                    <p:cond delay="0"/>
+                                  </p:stCondLst>
+                                  <p:childTnLst>
+                                    <p:set>
+                                      <p:cBhvr>
+                                        <p:cTn id="26" dur="1" fill="hold">
+                                          <p:stCondLst>
+                                            <p:cond delay="0"/>
+                                          </p:stCondLst>
+                                        </p:cTn>
+                                        <p:tgtEl>
+                                          <p:spTgt spid="3">
+                                            <p:txEl>
+                                              <p:pRg st="6" end="6"/>
+                                            </p:txEl>
+                                          </p:spTgt>
+                                        </p:tgtEl>
+                                        <p:attrNameLst>
+                                          <p:attrName>style.visibility</p:attrName>
+                                        </p:attrNameLst>
+                                      </p:cBhvr>
+                                      <p:to>
+                                        <p:strVal val="visible"/>
+                                      </p:to>
+                                    </p:set>
+                                  </p:childTnLst>
+                                </p:cTn>
+                              </p:par>
+                            </p:childTnLst>
+                          </p:cTn>
+                        </p:par>
+                      </p:childTnLst>
+                    </p:cTn>
+                  </p:par>
+                  <p:par>
+                    <p:cTn id="27" fill="hold">
+                      <p:stCondLst>
+                        <p:cond delay="indefinite"/>
+                      </p:stCondLst>
+                      <p:childTnLst>
+                        <p:par>
+                          <p:cTn id="28" fill="hold">
+                            <p:stCondLst>
+                              <p:cond delay="0"/>
+                            </p:stCondLst>
+                            <p:childTnLst>
+                              <p:par>
+                                <p:cTn id="29" presetID="1" presetClass="entr" presetSubtype="0" fill="hold" nodeType="clickEffect">
+                                  <p:stCondLst>
+                                    <p:cond delay="0"/>
+                                  </p:stCondLst>
+                                  <p:childTnLst>
+                                    <p:set>
+                                      <p:cBhvr>
+                                        <p:cTn id="30" dur="1" fill="hold">
+                                          <p:stCondLst>
+                                            <p:cond delay="0"/>
+                                          </p:stCondLst>
+                                        </p:cTn>
+                                        <p:tgtEl>
+                                          <p:spTgt spid="3">
+                                            <p:txEl>
+                                              <p:pRg st="7" end="7"/>
+                                            </p:txEl>
+                                          </p:spTgt>
+                                        </p:tgtEl>
+                                        <p:attrNameLst>
+                                          <p:attrName>style.visibility</p:attrName>
+                                        </p:attrNameLst>
+                                      </p:cBhvr>
+                                      <p:to>
+                                        <p:strVal val="visible"/>
+                                      </p:to>
+                                    </p:set>
+                                  </p:childTnLst>
+                                </p:cTn>
+                              </p:par>
+                            </p:childTnLst>
+                          </p:cTn>
+                        </p:par>
+                      </p:childTnLst>
+                    </p:cTn>
+                  </p:par>
+                  <p:par>
+                    <p:cTn id="31" fill="hold">
+                      <p:stCondLst>
+                        <p:cond delay="indefinite"/>
+                      </p:stCondLst>
+                      <p:childTnLst>
+                        <p:par>
+                          <p:cTn id="32" fill="hold">
+                            <p:stCondLst>
+                              <p:cond delay="0"/>
+                            </p:stCondLst>
+                            <p:childTnLst>
+                              <p:par>
+                                <p:cTn id="33" presetID="1" presetClass="entr" presetSubtype="0" fill="hold" nodeType="clickEffect">
+                                  <p:stCondLst>
+                                    <p:cond delay="0"/>
+                                  </p:stCondLst>
+                                  <p:childTnLst>
+                                    <p:set>
+                                      <p:cBhvr>
+                                        <p:cTn id="34" dur="1" fill="hold">
+                                          <p:stCondLst>
+                                            <p:cond delay="0"/>
+                                          </p:stCondLst>
+                                        </p:cTn>
+                                        <p:tgtEl>
+                                          <p:spTgt spid="3">
+                                            <p:txEl>
+                                              <p:pRg st="8" end="8"/>
+                                            </p:txEl>
+                                          </p:spTgt>
+                                        </p:tgtEl>
+                                        <p:attrNameLst>
+                                          <p:attrName>style.visibility</p:attrName>
+                                        </p:attrNameLst>
+                                      </p:cBhvr>
+                                      <p:to>
+                                        <p:strVal val="visible"/>
+                                      </p:to>
+                                    </p:set>
+                                  </p:childTnLst>
+                                </p:cTn>
+                              </p:par>
+                            </p:childTnLst>
+                          </p:cTn>
+                        </p:par>
+                      </p:childTnLst>
+                    </p:cTn>
+                  </p:par>
                 </p:childTnLst>
               </p:cTn>
               <p:prevCondLst>
@@ -3608,7 +3784,7 @@
             <a:pPr lvl="0"/>
             <a:r>
               <a:rPr lang="en-US"/>
-              <a:t>The corpus has 4 distict words</a:t>
+              <a:t>The corpus has 4 distinct words</a:t>
             </a:r>
             <a:endParaRPr lang="en-US"/>
           </a:p>
@@ -4189,10 +4365,56 @@
                   <a:txBody>
                     <a:bodyPr/>
                     <a:p>
-                      <a:pPr>
-                        <a:buNone/>
-                      </a:pPr>
-                      <a:endParaRPr lang="en-US"/>
+                      <a:pPr algn="r">
+                        <a:buNone/>
+                      </a:pPr>
+                      <a:r>
+                        <a:rPr lang="en-US" sz="1000" b="1">
+                          <a:solidFill>
+                            <a:srgbClr val="00B0F0"/>
+                          </a:solidFill>
+                          <a:latin typeface="Arial Bold" panose="020B0604020202090204" charset="0"/>
+                          <a:cs typeface="Arial Bold" panose="020B0604020202090204" charset="0"/>
+                        </a:rPr>
+                        <a:t>next word</a:t>
+                      </a:r>
+                      <a:endParaRPr lang="en-US" sz="2400" b="1">
+                        <a:solidFill>
+                          <a:schemeClr val="accent1">
+                            <a:lumMod val="75000"/>
+                          </a:schemeClr>
+                        </a:solidFill>
+                        <a:latin typeface="Arial Bold" panose="020B0604020202090204" charset="0"/>
+                        <a:cs typeface="Arial Bold" panose="020B0604020202090204" charset="0"/>
+                      </a:endParaRPr>
+                    </a:p>
+                    <a:p>
+                      <a:pPr algn="l">
+                        <a:buNone/>
+                      </a:pPr>
+                      <a:endParaRPr lang="en-US" sz="900"/>
+                    </a:p>
+                    <a:p>
+                      <a:pPr algn="l">
+                        <a:buNone/>
+                      </a:pPr>
+                      <a:r>
+                        <a:rPr lang="en-US" sz="1000" b="1">
+                          <a:solidFill>
+                            <a:srgbClr val="00B050"/>
+                          </a:solidFill>
+                          <a:latin typeface="Arial Bold" panose="020B0604020202090204" charset="0"/>
+                          <a:cs typeface="Arial Bold" panose="020B0604020202090204" charset="0"/>
+                        </a:rPr>
+                        <a:t>prev word</a:t>
+                      </a:r>
+                      <a:endParaRPr lang="en-US" sz="1000" b="1">
+                        <a:solidFill>
+                          <a:srgbClr val="00B050"/>
+                        </a:solidFill>
+                        <a:latin typeface="Arial Bold" panose="020B0604020202090204" charset="0"/>
+                        <a:cs typeface="Arial Bold" panose="020B0604020202090204" charset="0"/>
+                      </a:endParaRPr>
                     </a:p>
                   </a:txBody>
                   <a:tcPr/>
@@ -4206,12 +4428,18 @@
                       </a:pPr>
                       <a:r>
                         <a:rPr lang="en-US" b="1">
+                          <a:solidFill>
+                            <a:srgbClr val="00B0F0"/>
+                          </a:solidFill>
                           <a:latin typeface="Arial Bold" panose="020B0604020202090204" charset="0"/>
                           <a:cs typeface="Arial Bold" panose="020B0604020202090204" charset="0"/>
                         </a:rPr>
                         <a:t>i</a:t>
                       </a:r>
                       <a:endParaRPr lang="en-US" b="1">
+                        <a:solidFill>
+                          <a:srgbClr val="00B0F0"/>
+                        </a:solidFill>
                         <a:latin typeface="Arial Bold" panose="020B0604020202090204" charset="0"/>
                         <a:cs typeface="Arial Bold" panose="020B0604020202090204" charset="0"/>
                       </a:endParaRPr>
@@ -4228,12 +4456,18 @@
                       </a:pPr>
                       <a:r>
                         <a:rPr lang="en-US" b="1">
+                          <a:solidFill>
+                            <a:srgbClr val="00B0F0"/>
+                          </a:solidFill>
                           <a:latin typeface="Arial Bold" panose="020B0604020202090204" charset="0"/>
                           <a:cs typeface="Arial Bold" panose="020B0604020202090204" charset="0"/>
                         </a:rPr>
                         <a:t>like</a:t>
                       </a:r>
                       <a:endParaRPr lang="en-US" b="1">
+                        <a:solidFill>
+                          <a:srgbClr val="00B0F0"/>
+                        </a:solidFill>
                         <a:latin typeface="Arial Bold" panose="020B0604020202090204" charset="0"/>
                         <a:cs typeface="Arial Bold" panose="020B0604020202090204" charset="0"/>
                       </a:endParaRPr>
@@ -4250,12 +4484,18 @@
                       </a:pPr>
                       <a:r>
                         <a:rPr lang="en-US" b="1">
+                          <a:solidFill>
+                            <a:srgbClr val="00B0F0"/>
+                          </a:solidFill>
                           <a:latin typeface="Arial Bold" panose="020B0604020202090204" charset="0"/>
                           <a:cs typeface="Arial Bold" panose="020B0604020202090204" charset="0"/>
                         </a:rPr>
                         <a:t>cats</a:t>
                       </a:r>
                       <a:endParaRPr lang="en-US" b="1">
+                        <a:solidFill>
+                          <a:srgbClr val="00B0F0"/>
+                        </a:solidFill>
                         <a:latin typeface="Arial Bold" panose="020B0604020202090204" charset="0"/>
                         <a:cs typeface="Arial Bold" panose="020B0604020202090204" charset="0"/>
                       </a:endParaRPr>
@@ -4272,12 +4512,18 @@
                       </a:pPr>
                       <a:r>
                         <a:rPr lang="en-US" b="1">
+                          <a:solidFill>
+                            <a:srgbClr val="00B0F0"/>
+                          </a:solidFill>
                           <a:latin typeface="Arial Bold" panose="020B0604020202090204" charset="0"/>
                           <a:cs typeface="Arial Bold" panose="020B0604020202090204" charset="0"/>
                         </a:rPr>
                         <a:t>dogs</a:t>
                       </a:r>
                       <a:endParaRPr lang="en-US" b="1">
+                        <a:solidFill>
+                          <a:srgbClr val="00B0F0"/>
+                        </a:solidFill>
                         <a:latin typeface="Arial Bold" panose="020B0604020202090204" charset="0"/>
                         <a:cs typeface="Arial Bold" panose="020B0604020202090204" charset="0"/>
                       </a:endParaRPr>
@@ -4296,12 +4542,18 @@
                       </a:pPr>
                       <a:r>
                         <a:rPr lang="en-US" b="1">
+                          <a:solidFill>
+                            <a:srgbClr val="00B050"/>
+                          </a:solidFill>
                           <a:latin typeface="Arial Bold" panose="020B0604020202090204" charset="0"/>
                           <a:cs typeface="Arial Bold" panose="020B0604020202090204" charset="0"/>
                         </a:rPr>
                         <a:t>i</a:t>
                       </a:r>
                       <a:endParaRPr lang="en-US" b="1">
+                        <a:solidFill>
+                          <a:srgbClr val="00B050"/>
+                        </a:solidFill>
                         <a:latin typeface="Arial Bold" panose="020B0604020202090204" charset="0"/>
                         <a:cs typeface="Arial Bold" panose="020B0604020202090204" charset="0"/>
                       </a:endParaRPr>
@@ -4368,12 +4620,18 @@
                       </a:pPr>
                       <a:r>
                         <a:rPr lang="en-US" b="1">
+                          <a:solidFill>
+                            <a:srgbClr val="00B050"/>
+                          </a:solidFill>
                           <a:latin typeface="Arial Bold" panose="020B0604020202090204" charset="0"/>
                           <a:cs typeface="Arial Bold" panose="020B0604020202090204" charset="0"/>
                         </a:rPr>
                         <a:t>like</a:t>
                       </a:r>
                       <a:endParaRPr lang="en-US" b="1">
+                        <a:solidFill>
+                          <a:srgbClr val="00B050"/>
+                        </a:solidFill>
                         <a:latin typeface="Arial Bold" panose="020B0604020202090204" charset="0"/>
                         <a:cs typeface="Arial Bold" panose="020B0604020202090204" charset="0"/>
                       </a:endParaRPr>
@@ -4440,12 +4698,18 @@
                       </a:pPr>
                       <a:r>
                         <a:rPr lang="en-US" b="1">
+                          <a:solidFill>
+                            <a:srgbClr val="00B050"/>
+                          </a:solidFill>
                           <a:latin typeface="Arial Bold" panose="020B0604020202090204" charset="0"/>
                           <a:cs typeface="Arial Bold" panose="020B0604020202090204" charset="0"/>
                         </a:rPr>
                         <a:t>cats</a:t>
                       </a:r>
                       <a:endParaRPr lang="en-US" b="1">
+                        <a:solidFill>
+                          <a:srgbClr val="00B050"/>
+                        </a:solidFill>
                         <a:latin typeface="Arial Bold" panose="020B0604020202090204" charset="0"/>
                         <a:cs typeface="Arial Bold" panose="020B0604020202090204" charset="0"/>
                       </a:endParaRPr>
@@ -4512,12 +4776,18 @@
                       </a:pPr>
                       <a:r>
                         <a:rPr lang="en-US" b="1">
+                          <a:solidFill>
+                            <a:srgbClr val="00B050"/>
+                          </a:solidFill>
                           <a:latin typeface="Arial Bold" panose="020B0604020202090204" charset="0"/>
                           <a:cs typeface="Arial Bold" panose="020B0604020202090204" charset="0"/>
                         </a:rPr>
                         <a:t>dogs</a:t>
                       </a:r>
                       <a:endParaRPr lang="en-US" b="1">
+                        <a:solidFill>
+                          <a:srgbClr val="00B050"/>
+                        </a:solidFill>
                         <a:latin typeface="Arial Bold" panose="020B0604020202090204" charset="0"/>
                         <a:cs typeface="Arial Bold" panose="020B0604020202090204" charset="0"/>
                       </a:endParaRPr>
@@ -4580,12 +4850,12 @@
       </p:graphicFrame>
       <p:graphicFrame>
         <p:nvGraphicFramePr>
-          <p:cNvPr id="5" name="Table 4"/>
+          <p:cNvPr id="6" name="Table 5"/>
           <p:cNvGraphicFramePr/>
           <p:nvPr/>
         </p:nvGraphicFramePr>
         <p:xfrm>
-          <a:off x="5990590" y="4476115"/>
+          <a:off x="5990590" y="4384675"/>
           <a:ext cx="5438775" cy="1889760"/>
         </p:xfrm>
         <a:graphic>
@@ -4606,10 +4876,56 @@
                   <a:txBody>
                     <a:bodyPr/>
                     <a:p>
-                      <a:pPr>
-                        <a:buNone/>
-                      </a:pPr>
-                      <a:endParaRPr lang="en-US"/>
+                      <a:pPr algn="r">
+                        <a:buNone/>
+                      </a:pPr>
+                      <a:r>
+                        <a:rPr lang="en-US" sz="1000" b="1">
+                          <a:solidFill>
+                            <a:srgbClr val="00B0F0"/>
+                          </a:solidFill>
+                          <a:latin typeface="Arial Bold" panose="020B0604020202090204" charset="0"/>
+                          <a:cs typeface="Arial Bold" panose="020B0604020202090204" charset="0"/>
+                        </a:rPr>
+                        <a:t>next word</a:t>
+                      </a:r>
+                      <a:endParaRPr lang="en-US" sz="2400" b="1">
+                        <a:solidFill>
+                          <a:schemeClr val="accent1">
+                            <a:lumMod val="75000"/>
+                          </a:schemeClr>
+                        </a:solidFill>
+                        <a:latin typeface="Arial Bold" panose="020B0604020202090204" charset="0"/>
+                        <a:cs typeface="Arial Bold" panose="020B0604020202090204" charset="0"/>
+                      </a:endParaRPr>
+                    </a:p>
+                    <a:p>
+                      <a:pPr algn="l">
+                        <a:buNone/>
+                      </a:pPr>
+                      <a:endParaRPr lang="en-US" sz="900"/>
+                    </a:p>
+                    <a:p>
+                      <a:pPr algn="l">
+                        <a:buNone/>
+                      </a:pPr>
+                      <a:r>
+                        <a:rPr lang="en-US" sz="1000" b="1">
+                          <a:solidFill>
+                            <a:srgbClr val="00B050"/>
+                          </a:solidFill>
+                          <a:latin typeface="Arial Bold" panose="020B0604020202090204" charset="0"/>
+                          <a:cs typeface="Arial Bold" panose="020B0604020202090204" charset="0"/>
+                        </a:rPr>
+                        <a:t>prev word</a:t>
+                      </a:r>
+                      <a:endParaRPr lang="en-US" sz="1000" b="1">
+                        <a:solidFill>
+                          <a:srgbClr val="00B050"/>
+                        </a:solidFill>
+                        <a:latin typeface="Arial Bold" panose="020B0604020202090204" charset="0"/>
+                        <a:cs typeface="Arial Bold" panose="020B0604020202090204" charset="0"/>
+                      </a:endParaRPr>
                     </a:p>
                   </a:txBody>
                   <a:tcPr/>
@@ -4623,12 +4939,18 @@
                       </a:pPr>
                       <a:r>
                         <a:rPr lang="en-US" b="1">
+                          <a:solidFill>
+                            <a:srgbClr val="00B0F0"/>
+                          </a:solidFill>
                           <a:latin typeface="Arial Bold" panose="020B0604020202090204" charset="0"/>
                           <a:cs typeface="Arial Bold" panose="020B0604020202090204" charset="0"/>
                         </a:rPr>
                         <a:t>i</a:t>
                       </a:r>
                       <a:endParaRPr lang="en-US" b="1">
+                        <a:solidFill>
+                          <a:srgbClr val="00B0F0"/>
+                        </a:solidFill>
                         <a:latin typeface="Arial Bold" panose="020B0604020202090204" charset="0"/>
                         <a:cs typeface="Arial Bold" panose="020B0604020202090204" charset="0"/>
                       </a:endParaRPr>
@@ -4645,12 +4967,18 @@
                       </a:pPr>
                       <a:r>
                         <a:rPr lang="en-US" b="1">
+                          <a:solidFill>
+                            <a:srgbClr val="00B0F0"/>
+                          </a:solidFill>
                           <a:latin typeface="Arial Bold" panose="020B0604020202090204" charset="0"/>
                           <a:cs typeface="Arial Bold" panose="020B0604020202090204" charset="0"/>
                         </a:rPr>
                         <a:t>like</a:t>
                       </a:r>
                       <a:endParaRPr lang="en-US" b="1">
+                        <a:solidFill>
+                          <a:srgbClr val="00B0F0"/>
+                        </a:solidFill>
                         <a:latin typeface="Arial Bold" panose="020B0604020202090204" charset="0"/>
                         <a:cs typeface="Arial Bold" panose="020B0604020202090204" charset="0"/>
                       </a:endParaRPr>
@@ -4667,12 +4995,18 @@
                       </a:pPr>
                       <a:r>
                         <a:rPr lang="en-US" b="1">
+                          <a:solidFill>
+                            <a:srgbClr val="00B0F0"/>
+                          </a:solidFill>
                           <a:latin typeface="Arial Bold" panose="020B0604020202090204" charset="0"/>
                           <a:cs typeface="Arial Bold" panose="020B0604020202090204" charset="0"/>
                         </a:rPr>
                         <a:t>cats</a:t>
                       </a:r>
                       <a:endParaRPr lang="en-US" b="1">
+                        <a:solidFill>
+                          <a:srgbClr val="00B0F0"/>
+                        </a:solidFill>
                         <a:latin typeface="Arial Bold" panose="020B0604020202090204" charset="0"/>
                         <a:cs typeface="Arial Bold" panose="020B0604020202090204" charset="0"/>
                       </a:endParaRPr>
@@ -4689,12 +5023,18 @@
                       </a:pPr>
                       <a:r>
                         <a:rPr lang="en-US" b="1">
+                          <a:solidFill>
+                            <a:srgbClr val="00B0F0"/>
+                          </a:solidFill>
                           <a:latin typeface="Arial Bold" panose="020B0604020202090204" charset="0"/>
                           <a:cs typeface="Arial Bold" panose="020B0604020202090204" charset="0"/>
                         </a:rPr>
                         <a:t>dogs</a:t>
                       </a:r>
                       <a:endParaRPr lang="en-US" b="1">
+                        <a:solidFill>
+                          <a:srgbClr val="00B0F0"/>
+                        </a:solidFill>
                         <a:latin typeface="Arial Bold" panose="020B0604020202090204" charset="0"/>
                         <a:cs typeface="Arial Bold" panose="020B0604020202090204" charset="0"/>
                       </a:endParaRPr>
@@ -4713,12 +5053,18 @@
                       </a:pPr>
                       <a:r>
                         <a:rPr lang="en-US" b="1">
+                          <a:solidFill>
+                            <a:srgbClr val="00B050"/>
+                          </a:solidFill>
                           <a:latin typeface="Arial Bold" panose="020B0604020202090204" charset="0"/>
                           <a:cs typeface="Arial Bold" panose="020B0604020202090204" charset="0"/>
                         </a:rPr>
                         <a:t>i</a:t>
                       </a:r>
                       <a:endParaRPr lang="en-US" b="1">
+                        <a:solidFill>
+                          <a:srgbClr val="00B050"/>
+                        </a:solidFill>
                         <a:latin typeface="Arial Bold" panose="020B0604020202090204" charset="0"/>
                         <a:cs typeface="Arial Bold" panose="020B0604020202090204" charset="0"/>
                       </a:endParaRPr>
@@ -4785,12 +5131,18 @@
                       </a:pPr>
                       <a:r>
                         <a:rPr lang="en-US" b="1">
+                          <a:solidFill>
+                            <a:srgbClr val="00B050"/>
+                          </a:solidFill>
                           <a:latin typeface="Arial Bold" panose="020B0604020202090204" charset="0"/>
                           <a:cs typeface="Arial Bold" panose="020B0604020202090204" charset="0"/>
                         </a:rPr>
                         <a:t>like</a:t>
                       </a:r>
                       <a:endParaRPr lang="en-US" b="1">
+                        <a:solidFill>
+                          <a:srgbClr val="00B050"/>
+                        </a:solidFill>
                         <a:latin typeface="Arial Bold" panose="020B0604020202090204" charset="0"/>
                         <a:cs typeface="Arial Bold" panose="020B0604020202090204" charset="0"/>
                       </a:endParaRPr>
@@ -4857,12 +5209,18 @@
                       </a:pPr>
                       <a:r>
                         <a:rPr lang="en-US" b="1">
+                          <a:solidFill>
+                            <a:srgbClr val="00B050"/>
+                          </a:solidFill>
                           <a:latin typeface="Arial Bold" panose="020B0604020202090204" charset="0"/>
                           <a:cs typeface="Arial Bold" panose="020B0604020202090204" charset="0"/>
                         </a:rPr>
                         <a:t>cats</a:t>
                       </a:r>
                       <a:endParaRPr lang="en-US" b="1">
+                        <a:solidFill>
+                          <a:srgbClr val="00B050"/>
+                        </a:solidFill>
                         <a:latin typeface="Arial Bold" panose="020B0604020202090204" charset="0"/>
                         <a:cs typeface="Arial Bold" panose="020B0604020202090204" charset="0"/>
                       </a:endParaRPr>
@@ -4929,12 +5287,18 @@
                       </a:pPr>
                       <a:r>
                         <a:rPr lang="en-US" b="1">
+                          <a:solidFill>
+                            <a:srgbClr val="00B050"/>
+                          </a:solidFill>
                           <a:latin typeface="Arial Bold" panose="020B0604020202090204" charset="0"/>
                           <a:cs typeface="Arial Bold" panose="020B0604020202090204" charset="0"/>
                         </a:rPr>
                         <a:t>dogs</a:t>
                       </a:r>
                       <a:endParaRPr lang="en-US" b="1">
+                        <a:solidFill>
+                          <a:srgbClr val="00B050"/>
+                        </a:solidFill>
                         <a:latin typeface="Arial Bold" panose="020B0604020202090204" charset="0"/>
                         <a:cs typeface="Arial Bold" panose="020B0604020202090204" charset="0"/>
                       </a:endParaRPr>
@@ -5273,7 +5637,7 @@
                                           </p:stCondLst>
                                         </p:cTn>
                                         <p:tgtEl>
-                                          <p:spTgt spid="5"/>
+                                          <p:spTgt spid="6"/>
                                         </p:tgtEl>
                                         <p:attrNameLst>
                                           <p:attrName>style.visibility</p:attrName>
@@ -5346,7 +5710,7 @@
           <a:p>
             <a:r>
               <a:rPr lang="en-US"/>
-              <a:t>Fill in the blanks</a:t>
+              <a:t>What can we do with a Markov Matrix ?</a:t>
             </a:r>
             <a:endParaRPr lang="en-US"/>
           </a:p>
@@ -5379,7 +5743,7 @@
                 <a:latin typeface="Arial Bold" panose="020B0604020202090204" charset="0"/>
                 <a:cs typeface="Arial Bold" panose="020B0604020202090204" charset="0"/>
               </a:rPr>
-              <a:t>Example 1</a:t>
+              <a:t>Lets Fill in the Blanks</a:t>
             </a:r>
             <a:endParaRPr lang="en-US" b="1">
               <a:latin typeface="Arial Bold" panose="020B0604020202090204" charset="0"/>
@@ -5387,16 +5751,83 @@
             </a:endParaRPr>
           </a:p>
           <a:p>
+            <a:r>
+              <a:rPr lang="en-US" b="1">
+                <a:latin typeface="Arial Bold" panose="020B0604020202090204" charset="0"/>
+                <a:cs typeface="Arial Bold" panose="020B0604020202090204" charset="0"/>
+              </a:rPr>
+              <a:t>Example 1</a:t>
+            </a:r>
+            <a:endParaRPr lang="en-US" b="1">
+              <a:latin typeface="Arial Bold" panose="020B0604020202090204" charset="0"/>
+              <a:cs typeface="Arial Bold" panose="020B0604020202090204" charset="0"/>
+            </a:endParaRPr>
+          </a:p>
+          <a:p>
             <a:pPr lvl="1"/>
             <a:r>
               <a:rPr lang="en-US"/>
               <a:t>dogs </a:t>
             </a:r>
+            <a:r>
+              <a:rPr lang="en-US">
+                <a:solidFill>
+                  <a:schemeClr val="accent2">
+                    <a:lumMod val="75000"/>
+                  </a:schemeClr>
+                </a:solidFill>
+                <a:sym typeface="+mn-ea"/>
+              </a:rPr>
+              <a:t>___ ___</a:t>
+            </a:r>
+            <a:endParaRPr lang="en-US">
+              <a:solidFill>
+                <a:schemeClr val="accent2">
+                  <a:lumMod val="75000"/>
+                </a:schemeClr>
+              </a:solidFill>
+              <a:sym typeface="+mn-ea"/>
+            </a:endParaRPr>
+          </a:p>
+          <a:p>
+            <a:pPr lvl="1"/>
             <a:r>
               <a:rPr lang="en-US">
                 <a:sym typeface="+mn-ea"/>
               </a:rPr>
-              <a:t>___ ___</a:t>
+              <a:t>dogs </a:t>
+            </a:r>
+            <a:r>
+              <a:rPr lang="en-US">
+                <a:solidFill>
+                  <a:schemeClr val="accent2">
+                    <a:lumMod val="75000"/>
+                  </a:schemeClr>
+                </a:solidFill>
+                <a:sym typeface="+mn-ea"/>
+              </a:rPr>
+              <a:t>like</a:t>
+            </a:r>
+            <a:r>
+              <a:rPr lang="en-US">
+                <a:solidFill>
+                  <a:schemeClr val="accent2">
+                    <a:lumMod val="75000"/>
+                  </a:schemeClr>
+                </a:solidFill>
+              </a:rPr>
+              <a:t> </a:t>
+            </a:r>
+            <a:r>
+              <a:rPr lang="en-US">
+                <a:solidFill>
+                  <a:schemeClr val="accent2">
+                    <a:lumMod val="75000"/>
+                  </a:schemeClr>
+                </a:solidFill>
+                <a:sym typeface="+mn-ea"/>
+              </a:rPr>
+              <a:t>___</a:t>
             </a:r>
             <a:endParaRPr lang="en-US">
               <a:sym typeface="+mn-ea"/>
@@ -5408,29 +5839,18 @@
               <a:rPr lang="en-US">
                 <a:sym typeface="+mn-ea"/>
               </a:rPr>
-              <a:t>dogs like</a:t>
-            </a:r>
-            <a:r>
-              <a:rPr lang="en-US"/>
-              <a:t> </a:t>
+              <a:t>dogs </a:t>
             </a:r>
             <a:r>
               <a:rPr lang="en-US">
+                <a:solidFill>
+                  <a:schemeClr val="accent2">
+                    <a:lumMod val="75000"/>
+                  </a:schemeClr>
+                </a:solidFill>
                 <a:sym typeface="+mn-ea"/>
               </a:rPr>
-              <a:t>___</a:t>
-            </a:r>
-            <a:endParaRPr lang="en-US">
-              <a:sym typeface="+mn-ea"/>
-            </a:endParaRPr>
-          </a:p>
-          <a:p>
-            <a:pPr lvl="1"/>
-            <a:r>
-              <a:rPr lang="en-US">
-                <a:sym typeface="+mn-ea"/>
-              </a:rPr>
-              <a:t>dogs like cats</a:t>
+              <a:t>like cats</a:t>
             </a:r>
             <a:endParaRPr lang="en-US">
               <a:sym typeface="+mn-ea"/>
@@ -5462,9 +5882,25 @@
             <a:pPr lvl="1"/>
             <a:r>
               <a:rPr lang="en-US"/>
-              <a:t>cats ___ ___</a:t>
-            </a:r>
-            <a:endParaRPr lang="en-US"/>
+              <a:t>cats </a:t>
+            </a:r>
+            <a:r>
+              <a:rPr lang="en-US">
+                <a:solidFill>
+                  <a:schemeClr val="accent2">
+                    <a:lumMod val="75000"/>
+                  </a:schemeClr>
+                </a:solidFill>
+              </a:rPr>
+              <a:t>___ ___</a:t>
+            </a:r>
+            <a:endParaRPr lang="en-US">
+              <a:solidFill>
+                <a:schemeClr val="accent2">
+                  <a:lumMod val="75000"/>
+                </a:schemeClr>
+              </a:solidFill>
+            </a:endParaRPr>
           </a:p>
           <a:p>
             <a:pPr lvl="1"/>
@@ -5472,7 +5908,18 @@
               <a:rPr lang="en-US">
                 <a:sym typeface="+mn-ea"/>
               </a:rPr>
-              <a:t>cats like ___</a:t>
+              <a:t>cats </a:t>
+            </a:r>
+            <a:r>
+              <a:rPr lang="en-US">
+                <a:solidFill>
+                  <a:schemeClr val="accent2">
+                    <a:lumMod val="75000"/>
+                  </a:schemeClr>
+                </a:solidFill>
+                <a:sym typeface="+mn-ea"/>
+              </a:rPr>
+              <a:t>like ___</a:t>
             </a:r>
             <a:endParaRPr lang="en-US"/>
           </a:p>
@@ -5480,449 +5927,28 @@
             <a:pPr lvl="1"/>
             <a:r>
               <a:rPr lang="en-US"/>
-              <a:t>cats like cats</a:t>
-            </a:r>
-            <a:endParaRPr lang="en-US"/>
+              <a:t>cats </a:t>
+            </a:r>
+            <a:r>
+              <a:rPr lang="en-US">
+                <a:solidFill>
+                  <a:schemeClr val="accent2">
+                    <a:lumMod val="75000"/>
+                  </a:schemeClr>
+                </a:solidFill>
+              </a:rPr>
+              <a:t>like cats</a:t>
+            </a:r>
+            <a:endParaRPr lang="en-US">
+              <a:solidFill>
+                <a:schemeClr val="accent2">
+                  <a:lumMod val="75000"/>
+                </a:schemeClr>
+              </a:solidFill>
+            </a:endParaRPr>
           </a:p>
         </p:txBody>
       </p:sp>
-      <p:graphicFrame>
-        <p:nvGraphicFramePr>
-          <p:cNvPr id="5" name="Table 4"/>
-          <p:cNvGraphicFramePr/>
-          <p:nvPr/>
-        </p:nvGraphicFramePr>
-        <p:xfrm>
-          <a:off x="791845" y="1792605"/>
-          <a:ext cx="5438775" cy="1889760"/>
-        </p:xfrm>
-        <a:graphic>
-          <a:graphicData uri="http://schemas.openxmlformats.org/drawingml/2006/table">
-            <a:tbl>
-              <a:tblPr firstRow="1" bandRow="1">
-                <a:tableStyleId>{5940675A-B579-460E-94D1-54222C63F5DA}</a:tableStyleId>
-              </a:tblPr>
-              <a:tblGrid>
-                <a:gridCol w="1087755"/>
-                <a:gridCol w="1087755"/>
-                <a:gridCol w="1087755"/>
-                <a:gridCol w="1087755"/>
-                <a:gridCol w="1087755"/>
-              </a:tblGrid>
-              <a:tr h="340995">
-                <a:tc>
-                  <a:txBody>
-                    <a:bodyPr/>
-                    <a:p>
-                      <a:pPr>
-                        <a:buNone/>
-                      </a:pPr>
-                      <a:endParaRPr lang="en-US"/>
-                    </a:p>
-                  </a:txBody>
-                  <a:tcPr/>
-                </a:tc>
-                <a:tc>
-                  <a:txBody>
-                    <a:bodyPr/>
-                    <a:p>
-                      <a:pPr>
-                        <a:buNone/>
-                      </a:pPr>
-                      <a:r>
-                        <a:rPr lang="en-US" b="1">
-                          <a:latin typeface="Arial Bold" panose="020B0604020202090204" charset="0"/>
-                          <a:cs typeface="Arial Bold" panose="020B0604020202090204" charset="0"/>
-                        </a:rPr>
-                        <a:t>i</a:t>
-                      </a:r>
-                      <a:endParaRPr lang="en-US" b="1">
-                        <a:latin typeface="Arial Bold" panose="020B0604020202090204" charset="0"/>
-                        <a:cs typeface="Arial Bold" panose="020B0604020202090204" charset="0"/>
-                      </a:endParaRPr>
-                    </a:p>
-                  </a:txBody>
-                  <a:tcPr/>
-                </a:tc>
-                <a:tc>
-                  <a:txBody>
-                    <a:bodyPr/>
-                    <a:p>
-                      <a:pPr>
-                        <a:buNone/>
-                      </a:pPr>
-                      <a:r>
-                        <a:rPr lang="en-US" b="1">
-                          <a:latin typeface="Arial Bold" panose="020B0604020202090204" charset="0"/>
-                          <a:cs typeface="Arial Bold" panose="020B0604020202090204" charset="0"/>
-                        </a:rPr>
-                        <a:t>like</a:t>
-                      </a:r>
-                      <a:endParaRPr lang="en-US" b="1">
-                        <a:latin typeface="Arial Bold" panose="020B0604020202090204" charset="0"/>
-                        <a:cs typeface="Arial Bold" panose="020B0604020202090204" charset="0"/>
-                      </a:endParaRPr>
-                    </a:p>
-                  </a:txBody>
-                  <a:tcPr/>
-                </a:tc>
-                <a:tc>
-                  <a:txBody>
-                    <a:bodyPr/>
-                    <a:p>
-                      <a:pPr>
-                        <a:buNone/>
-                      </a:pPr>
-                      <a:r>
-                        <a:rPr lang="en-US" b="1">
-                          <a:latin typeface="Arial Bold" panose="020B0604020202090204" charset="0"/>
-                          <a:cs typeface="Arial Bold" panose="020B0604020202090204" charset="0"/>
-                        </a:rPr>
-                        <a:t>cats</a:t>
-                      </a:r>
-                      <a:endParaRPr lang="en-US" b="1">
-                        <a:latin typeface="Arial Bold" panose="020B0604020202090204" charset="0"/>
-                        <a:cs typeface="Arial Bold" panose="020B0604020202090204" charset="0"/>
-                      </a:endParaRPr>
-                    </a:p>
-                  </a:txBody>
-                  <a:tcPr/>
-                </a:tc>
-                <a:tc>
-                  <a:txBody>
-                    <a:bodyPr/>
-                    <a:p>
-                      <a:pPr>
-                        <a:buNone/>
-                      </a:pPr>
-                      <a:r>
-                        <a:rPr lang="en-US" b="1">
-                          <a:latin typeface="Arial Bold" panose="020B0604020202090204" charset="0"/>
-                          <a:cs typeface="Arial Bold" panose="020B0604020202090204" charset="0"/>
-                        </a:rPr>
-                        <a:t>dogs</a:t>
-                      </a:r>
-                      <a:endParaRPr lang="en-US" b="1">
-                        <a:latin typeface="Arial Bold" panose="020B0604020202090204" charset="0"/>
-                        <a:cs typeface="Arial Bold" panose="020B0604020202090204" charset="0"/>
-                      </a:endParaRPr>
-                    </a:p>
-                  </a:txBody>
-                  <a:tcPr/>
-                </a:tc>
-              </a:tr>
-              <a:tr h="381000">
-                <a:tc>
-                  <a:txBody>
-                    <a:bodyPr/>
-                    <a:p>
-                      <a:pPr>
-                        <a:buNone/>
-                      </a:pPr>
-                      <a:r>
-                        <a:rPr lang="en-US" b="1">
-                          <a:latin typeface="Arial Bold" panose="020B0604020202090204" charset="0"/>
-                          <a:cs typeface="Arial Bold" panose="020B0604020202090204" charset="0"/>
-                        </a:rPr>
-                        <a:t>i</a:t>
-                      </a:r>
-                      <a:endParaRPr lang="en-US" b="1">
-                        <a:latin typeface="Arial Bold" panose="020B0604020202090204" charset="0"/>
-                        <a:cs typeface="Arial Bold" panose="020B0604020202090204" charset="0"/>
-                      </a:endParaRPr>
-                    </a:p>
-                  </a:txBody>
-                  <a:tcPr/>
-                </a:tc>
-                <a:tc>
-                  <a:txBody>
-                    <a:bodyPr/>
-                    <a:p>
-                      <a:pPr>
-                        <a:buNone/>
-                      </a:pPr>
-                      <a:endParaRPr lang="en-US"/>
-                    </a:p>
-                  </a:txBody>
-                  <a:tcPr/>
-                </a:tc>
-                <a:tc>
-                  <a:txBody>
-                    <a:bodyPr/>
-                    <a:p>
-                      <a:pPr>
-                        <a:buNone/>
-                      </a:pPr>
-                      <a:r>
-                        <a:rPr lang="en-US"/>
-                        <a:t>1</a:t>
-                      </a:r>
-                      <a:endParaRPr lang="en-US"/>
-                    </a:p>
-                  </a:txBody>
-                  <a:tcPr/>
-                </a:tc>
-                <a:tc>
-                  <a:txBody>
-                    <a:bodyPr/>
-                    <a:p>
-                      <a:pPr>
-                        <a:buNone/>
-                      </a:pPr>
-                      <a:endParaRPr lang="en-US"/>
-                    </a:p>
-                  </a:txBody>
-                  <a:tcPr/>
-                </a:tc>
-                <a:tc>
-                  <a:txBody>
-                    <a:bodyPr/>
-                    <a:p>
-                      <a:pPr>
-                        <a:buNone/>
-                      </a:pPr>
-                      <a:endParaRPr lang="en-US"/>
-                    </a:p>
-                  </a:txBody>
-                  <a:tcPr/>
-                </a:tc>
-              </a:tr>
-              <a:tr h="381000">
-                <a:tc>
-                  <a:txBody>
-                    <a:bodyPr/>
-                    <a:p>
-                      <a:pPr>
-                        <a:buNone/>
-                      </a:pPr>
-                      <a:r>
-                        <a:rPr lang="en-US" b="1">
-                          <a:latin typeface="Arial Bold" panose="020B0604020202090204" charset="0"/>
-                          <a:cs typeface="Arial Bold" panose="020B0604020202090204" charset="0"/>
-                        </a:rPr>
-                        <a:t>like</a:t>
-                      </a:r>
-                      <a:endParaRPr lang="en-US" b="1">
-                        <a:latin typeface="Arial Bold" panose="020B0604020202090204" charset="0"/>
-                        <a:cs typeface="Arial Bold" panose="020B0604020202090204" charset="0"/>
-                      </a:endParaRPr>
-                    </a:p>
-                  </a:txBody>
-                  <a:tcPr/>
-                </a:tc>
-                <a:tc>
-                  <a:txBody>
-                    <a:bodyPr/>
-                    <a:p>
-                      <a:pPr>
-                        <a:buNone/>
-                      </a:pPr>
-                      <a:endParaRPr lang="en-US"/>
-                    </a:p>
-                  </a:txBody>
-                  <a:tcPr/>
-                </a:tc>
-                <a:tc>
-                  <a:txBody>
-                    <a:bodyPr/>
-                    <a:p>
-                      <a:pPr>
-                        <a:buNone/>
-                      </a:pPr>
-                      <a:endParaRPr lang="en-US"/>
-                    </a:p>
-                  </a:txBody>
-                  <a:tcPr/>
-                </a:tc>
-                <a:tc>
-                  <a:txBody>
-                    <a:bodyPr/>
-                    <a:p>
-                      <a:pPr>
-                        <a:buNone/>
-                      </a:pPr>
-                      <a:r>
-                        <a:rPr lang="en-US"/>
-                        <a:t>0.66</a:t>
-                      </a:r>
-                      <a:endParaRPr lang="en-US"/>
-                    </a:p>
-                  </a:txBody>
-                  <a:tcPr/>
-                </a:tc>
-                <a:tc>
-                  <a:txBody>
-                    <a:bodyPr/>
-                    <a:p>
-                      <a:pPr>
-                        <a:buNone/>
-                      </a:pPr>
-                      <a:r>
-                        <a:rPr lang="en-US"/>
-                        <a:t>0.33</a:t>
-                      </a:r>
-                      <a:endParaRPr lang="en-US"/>
-                    </a:p>
-                  </a:txBody>
-                  <a:tcPr/>
-                </a:tc>
-              </a:tr>
-              <a:tr h="381000">
-                <a:tc>
-                  <a:txBody>
-                    <a:bodyPr/>
-                    <a:p>
-                      <a:pPr>
-                        <a:buNone/>
-                      </a:pPr>
-                      <a:r>
-                        <a:rPr lang="en-US" b="1">
-                          <a:latin typeface="Arial Bold" panose="020B0604020202090204" charset="0"/>
-                          <a:cs typeface="Arial Bold" panose="020B0604020202090204" charset="0"/>
-                        </a:rPr>
-                        <a:t>cats</a:t>
-                      </a:r>
-                      <a:endParaRPr lang="en-US" b="1">
-                        <a:latin typeface="Arial Bold" panose="020B0604020202090204" charset="0"/>
-                        <a:cs typeface="Arial Bold" panose="020B0604020202090204" charset="0"/>
-                      </a:endParaRPr>
-                    </a:p>
-                  </a:txBody>
-                  <a:tcPr/>
-                </a:tc>
-                <a:tc>
-                  <a:txBody>
-                    <a:bodyPr/>
-                    <a:p>
-                      <a:pPr>
-                        <a:buNone/>
-                      </a:pPr>
-                      <a:endParaRPr lang="en-US"/>
-                    </a:p>
-                  </a:txBody>
-                  <a:tcPr/>
-                </a:tc>
-                <a:tc>
-                  <a:txBody>
-                    <a:bodyPr/>
-                    <a:p>
-                      <a:pPr>
-                        <a:buNone/>
-                      </a:pPr>
-                      <a:r>
-                        <a:rPr lang="en-US"/>
-                        <a:t>1</a:t>
-                      </a:r>
-                      <a:endParaRPr lang="en-US"/>
-                    </a:p>
-                  </a:txBody>
-                  <a:tcPr/>
-                </a:tc>
-                <a:tc>
-                  <a:txBody>
-                    <a:bodyPr/>
-                    <a:p>
-                      <a:pPr>
-                        <a:buNone/>
-                      </a:pPr>
-                      <a:endParaRPr lang="en-US"/>
-                    </a:p>
-                  </a:txBody>
-                  <a:tcPr/>
-                </a:tc>
-                <a:tc>
-                  <a:txBody>
-                    <a:bodyPr/>
-                    <a:p>
-                      <a:pPr>
-                        <a:buNone/>
-                      </a:pPr>
-                      <a:endParaRPr lang="en-US"/>
-                    </a:p>
-                  </a:txBody>
-                  <a:tcPr/>
-                </a:tc>
-              </a:tr>
-              <a:tr h="381000">
-                <a:tc>
-                  <a:txBody>
-                    <a:bodyPr/>
-                    <a:p>
-                      <a:pPr>
-                        <a:buNone/>
-                      </a:pPr>
-                      <a:r>
-                        <a:rPr lang="en-US" b="1">
-                          <a:latin typeface="Arial Bold" panose="020B0604020202090204" charset="0"/>
-                          <a:cs typeface="Arial Bold" panose="020B0604020202090204" charset="0"/>
-                        </a:rPr>
-                        <a:t>dogs</a:t>
-                      </a:r>
-                      <a:endParaRPr lang="en-US" b="1">
-                        <a:latin typeface="Arial Bold" panose="020B0604020202090204" charset="0"/>
-                        <a:cs typeface="Arial Bold" panose="020B0604020202090204" charset="0"/>
-                      </a:endParaRPr>
-                    </a:p>
-                  </a:txBody>
-                  <a:tcPr/>
-                </a:tc>
-                <a:tc>
-                  <a:txBody>
-                    <a:bodyPr/>
-                    <a:p>
-                      <a:pPr>
-                        <a:buNone/>
-                      </a:pPr>
-                      <a:endParaRPr lang="en-US"/>
-                    </a:p>
-                  </a:txBody>
-                  <a:tcPr/>
-                </a:tc>
-                <a:tc>
-                  <a:txBody>
-                    <a:bodyPr/>
-                    <a:p>
-                      <a:pPr>
-                        <a:buNone/>
-                      </a:pPr>
-                      <a:r>
-                        <a:rPr lang="en-US"/>
-                        <a:t>1</a:t>
-                      </a:r>
-                      <a:endParaRPr lang="en-US"/>
-                    </a:p>
-                  </a:txBody>
-                  <a:tcPr/>
-                </a:tc>
-                <a:tc>
-                  <a:txBody>
-                    <a:bodyPr/>
-                    <a:p>
-                      <a:pPr>
-                        <a:buNone/>
-                      </a:pPr>
-                      <a:endParaRPr lang="en-US"/>
-                    </a:p>
-                  </a:txBody>
-                  <a:tcPr/>
-                </a:tc>
-                <a:tc>
-                  <a:txBody>
-                    <a:bodyPr/>
-                    <a:p>
-                      <a:pPr>
-                        <a:buNone/>
-                      </a:pPr>
-                      <a:endParaRPr lang="en-US"/>
-                    </a:p>
-                  </a:txBody>
-                  <a:tcPr/>
-                </a:tc>
-              </a:tr>
-            </a:tbl>
-          </a:graphicData>
-        </a:graphic>
-      </p:graphicFrame>
       <p:sp>
         <p:nvSpPr>
           <p:cNvPr id="4" name="Text Box 3"/>
@@ -5986,6 +6012,537 @@
           </a:p>
         </p:txBody>
       </p:sp>
+      <p:graphicFrame>
+        <p:nvGraphicFramePr>
+          <p:cNvPr id="6" name="Table 5"/>
+          <p:cNvGraphicFramePr/>
+          <p:nvPr/>
+        </p:nvGraphicFramePr>
+        <p:xfrm>
+          <a:off x="697865" y="1690370"/>
+          <a:ext cx="5438775" cy="1889760"/>
+        </p:xfrm>
+        <a:graphic>
+          <a:graphicData uri="http://schemas.openxmlformats.org/drawingml/2006/table">
+            <a:tbl>
+              <a:tblPr firstRow="1" bandRow="1">
+                <a:tableStyleId>{5940675A-B579-460E-94D1-54222C63F5DA}</a:tableStyleId>
+              </a:tblPr>
+              <a:tblGrid>
+                <a:gridCol w="1087755"/>
+                <a:gridCol w="1087755"/>
+                <a:gridCol w="1087755"/>
+                <a:gridCol w="1087755"/>
+                <a:gridCol w="1087755"/>
+              </a:tblGrid>
+              <a:tr h="340995">
+                <a:tc>
+                  <a:txBody>
+                    <a:bodyPr/>
+                    <a:p>
+                      <a:pPr algn="r">
+                        <a:buNone/>
+                      </a:pPr>
+                      <a:r>
+                        <a:rPr lang="en-US" sz="1000" b="1">
+                          <a:solidFill>
+                            <a:srgbClr val="00B0F0"/>
+                          </a:solidFill>
+                          <a:latin typeface="Arial Bold" panose="020B0604020202090204" charset="0"/>
+                          <a:cs typeface="Arial Bold" panose="020B0604020202090204" charset="0"/>
+                        </a:rPr>
+                        <a:t>next word</a:t>
+                      </a:r>
+                      <a:endParaRPr lang="en-US" sz="2400" b="1">
+                        <a:solidFill>
+                          <a:schemeClr val="accent1">
+                            <a:lumMod val="75000"/>
+                          </a:schemeClr>
+                        </a:solidFill>
+                        <a:latin typeface="Arial Bold" panose="020B0604020202090204" charset="0"/>
+                        <a:cs typeface="Arial Bold" panose="020B0604020202090204" charset="0"/>
+                      </a:endParaRPr>
+                    </a:p>
+                    <a:p>
+                      <a:pPr algn="l">
+                        <a:buNone/>
+                      </a:pPr>
+                      <a:endParaRPr lang="en-US" sz="900"/>
+                    </a:p>
+                    <a:p>
+                      <a:pPr algn="l">
+                        <a:buNone/>
+                      </a:pPr>
+                      <a:r>
+                        <a:rPr lang="en-US" sz="1000" b="1">
+                          <a:solidFill>
+                            <a:srgbClr val="00B050"/>
+                          </a:solidFill>
+                          <a:latin typeface="Arial Bold" panose="020B0604020202090204" charset="0"/>
+                          <a:cs typeface="Arial Bold" panose="020B0604020202090204" charset="0"/>
+                        </a:rPr>
+                        <a:t>prev word</a:t>
+                      </a:r>
+                      <a:endParaRPr lang="en-US" sz="1000" b="1">
+                        <a:solidFill>
+                          <a:srgbClr val="00B050"/>
+                        </a:solidFill>
+                        <a:latin typeface="Arial Bold" panose="020B0604020202090204" charset="0"/>
+                        <a:cs typeface="Arial Bold" panose="020B0604020202090204" charset="0"/>
+                      </a:endParaRPr>
+                    </a:p>
+                  </a:txBody>
+                  <a:tcPr/>
+                </a:tc>
+                <a:tc>
+                  <a:txBody>
+                    <a:bodyPr/>
+                    <a:p>
+                      <a:pPr>
+                        <a:buNone/>
+                      </a:pPr>
+                      <a:r>
+                        <a:rPr lang="en-US" b="1">
+                          <a:solidFill>
+                            <a:srgbClr val="00B0F0"/>
+                          </a:solidFill>
+                          <a:latin typeface="Arial Bold" panose="020B0604020202090204" charset="0"/>
+                          <a:cs typeface="Arial Bold" panose="020B0604020202090204" charset="0"/>
+                        </a:rPr>
+                        <a:t>i</a:t>
+                      </a:r>
+                      <a:endParaRPr lang="en-US" b="1">
+                        <a:solidFill>
+                          <a:srgbClr val="00B0F0"/>
+                        </a:solidFill>
+                        <a:latin typeface="Arial Bold" panose="020B0604020202090204" charset="0"/>
+                        <a:cs typeface="Arial Bold" panose="020B0604020202090204" charset="0"/>
+                      </a:endParaRPr>
+                    </a:p>
+                  </a:txBody>
+                  <a:tcPr/>
+                </a:tc>
+                <a:tc>
+                  <a:txBody>
+                    <a:bodyPr/>
+                    <a:p>
+                      <a:pPr>
+                        <a:buNone/>
+                      </a:pPr>
+                      <a:r>
+                        <a:rPr lang="en-US" b="1">
+                          <a:solidFill>
+                            <a:srgbClr val="00B0F0"/>
+                          </a:solidFill>
+                          <a:latin typeface="Arial Bold" panose="020B0604020202090204" charset="0"/>
+                          <a:cs typeface="Arial Bold" panose="020B0604020202090204" charset="0"/>
+                        </a:rPr>
+                        <a:t>like</a:t>
+                      </a:r>
+                      <a:endParaRPr lang="en-US" b="1">
+                        <a:solidFill>
+                          <a:srgbClr val="00B0F0"/>
+                        </a:solidFill>
+                        <a:latin typeface="Arial Bold" panose="020B0604020202090204" charset="0"/>
+                        <a:cs typeface="Arial Bold" panose="020B0604020202090204" charset="0"/>
+                      </a:endParaRPr>
+                    </a:p>
+                  </a:txBody>
+                  <a:tcPr/>
+                </a:tc>
+                <a:tc>
+                  <a:txBody>
+                    <a:bodyPr/>
+                    <a:p>
+                      <a:pPr>
+                        <a:buNone/>
+                      </a:pPr>
+                      <a:r>
+                        <a:rPr lang="en-US" b="1">
+                          <a:solidFill>
+                            <a:srgbClr val="00B0F0"/>
+                          </a:solidFill>
+                          <a:latin typeface="Arial Bold" panose="020B0604020202090204" charset="0"/>
+                          <a:cs typeface="Arial Bold" panose="020B0604020202090204" charset="0"/>
+                        </a:rPr>
+                        <a:t>cats</a:t>
+                      </a:r>
+                      <a:endParaRPr lang="en-US" b="1">
+                        <a:solidFill>
+                          <a:srgbClr val="00B0F0"/>
+                        </a:solidFill>
+                        <a:latin typeface="Arial Bold" panose="020B0604020202090204" charset="0"/>
+                        <a:cs typeface="Arial Bold" panose="020B0604020202090204" charset="0"/>
+                      </a:endParaRPr>
+                    </a:p>
+                  </a:txBody>
+                  <a:tcPr/>
+                </a:tc>
+                <a:tc>
+                  <a:txBody>
+                    <a:bodyPr/>
+                    <a:p>
+                      <a:pPr>
+                        <a:buNone/>
+                      </a:pPr>
+                      <a:r>
+                        <a:rPr lang="en-US" b="1">
+                          <a:solidFill>
+                            <a:srgbClr val="00B0F0"/>
+                          </a:solidFill>
+                          <a:latin typeface="Arial Bold" panose="020B0604020202090204" charset="0"/>
+                          <a:cs typeface="Arial Bold" panose="020B0604020202090204" charset="0"/>
+                        </a:rPr>
+                        <a:t>dogs</a:t>
+                      </a:r>
+                      <a:endParaRPr lang="en-US" b="1">
+                        <a:solidFill>
+                          <a:srgbClr val="00B0F0"/>
+                        </a:solidFill>
+                        <a:latin typeface="Arial Bold" panose="020B0604020202090204" charset="0"/>
+                        <a:cs typeface="Arial Bold" panose="020B0604020202090204" charset="0"/>
+                      </a:endParaRPr>
+                    </a:p>
+                  </a:txBody>
+                  <a:tcPr/>
+                </a:tc>
+              </a:tr>
+              <a:tr h="381000">
+                <a:tc>
+                  <a:txBody>
+                    <a:bodyPr/>
+                    <a:p>
+                      <a:pPr>
+                        <a:buNone/>
+                      </a:pPr>
+                      <a:r>
+                        <a:rPr lang="en-US" b="1">
+                          <a:solidFill>
+                            <a:srgbClr val="00B050"/>
+                          </a:solidFill>
+                          <a:latin typeface="Arial Bold" panose="020B0604020202090204" charset="0"/>
+                          <a:cs typeface="Arial Bold" panose="020B0604020202090204" charset="0"/>
+                        </a:rPr>
+                        <a:t>i</a:t>
+                      </a:r>
+                      <a:endParaRPr lang="en-US" b="1">
+                        <a:solidFill>
+                          <a:srgbClr val="00B050"/>
+                        </a:solidFill>
+                        <a:latin typeface="Arial Bold" panose="020B0604020202090204" charset="0"/>
+                        <a:cs typeface="Arial Bold" panose="020B0604020202090204" charset="0"/>
+                      </a:endParaRPr>
+                    </a:p>
+                  </a:txBody>
+                  <a:tcPr/>
+                </a:tc>
+                <a:tc>
+                  <a:txBody>
+                    <a:bodyPr/>
+                    <a:p>
+                      <a:pPr>
+                        <a:buNone/>
+                      </a:pPr>
+                      <a:endParaRPr lang="en-US"/>
+                    </a:p>
+                  </a:txBody>
+                  <a:tcPr/>
+                </a:tc>
+                <a:tc>
+                  <a:txBody>
+                    <a:bodyPr/>
+                    <a:p>
+                      <a:pPr>
+                        <a:buNone/>
+                      </a:pPr>
+                      <a:r>
+                        <a:rPr lang="en-US"/>
+                        <a:t>1</a:t>
+                      </a:r>
+                      <a:endParaRPr lang="en-US"/>
+                    </a:p>
+                  </a:txBody>
+                  <a:tcPr/>
+                </a:tc>
+                <a:tc>
+                  <a:txBody>
+                    <a:bodyPr/>
+                    <a:p>
+                      <a:pPr>
+                        <a:buNone/>
+                      </a:pPr>
+                      <a:endParaRPr lang="en-US"/>
+                    </a:p>
+                  </a:txBody>
+                  <a:tcPr/>
+                </a:tc>
+                <a:tc>
+                  <a:txBody>
+                    <a:bodyPr/>
+                    <a:p>
+                      <a:pPr>
+                        <a:buNone/>
+                      </a:pPr>
+                      <a:endParaRPr lang="en-US"/>
+                    </a:p>
+                  </a:txBody>
+                  <a:tcPr/>
+                </a:tc>
+              </a:tr>
+              <a:tr h="381000">
+                <a:tc>
+                  <a:txBody>
+                    <a:bodyPr/>
+                    <a:p>
+                      <a:pPr>
+                        <a:buNone/>
+                      </a:pPr>
+                      <a:r>
+                        <a:rPr lang="en-US" b="1">
+                          <a:solidFill>
+                            <a:srgbClr val="00B050"/>
+                          </a:solidFill>
+                          <a:latin typeface="Arial Bold" panose="020B0604020202090204" charset="0"/>
+                          <a:cs typeface="Arial Bold" panose="020B0604020202090204" charset="0"/>
+                        </a:rPr>
+                        <a:t>like</a:t>
+                      </a:r>
+                      <a:endParaRPr lang="en-US" b="1">
+                        <a:solidFill>
+                          <a:srgbClr val="00B050"/>
+                        </a:solidFill>
+                        <a:latin typeface="Arial Bold" panose="020B0604020202090204" charset="0"/>
+                        <a:cs typeface="Arial Bold" panose="020B0604020202090204" charset="0"/>
+                      </a:endParaRPr>
+                    </a:p>
+                  </a:txBody>
+                  <a:tcPr/>
+                </a:tc>
+                <a:tc>
+                  <a:txBody>
+                    <a:bodyPr/>
+                    <a:p>
+                      <a:pPr>
+                        <a:buNone/>
+                      </a:pPr>
+                      <a:endParaRPr lang="en-US"/>
+                    </a:p>
+                  </a:txBody>
+                  <a:tcPr/>
+                </a:tc>
+                <a:tc>
+                  <a:txBody>
+                    <a:bodyPr/>
+                    <a:p>
+                      <a:pPr>
+                        <a:buNone/>
+                      </a:pPr>
+                      <a:endParaRPr lang="en-US"/>
+                    </a:p>
+                  </a:txBody>
+                  <a:tcPr/>
+                </a:tc>
+                <a:tc>
+                  <a:txBody>
+                    <a:bodyPr/>
+                    <a:p>
+                      <a:pPr>
+                        <a:buNone/>
+                      </a:pPr>
+                      <a:r>
+                        <a:rPr lang="en-US"/>
+                        <a:t>0.66</a:t>
+                      </a:r>
+                      <a:endParaRPr lang="en-US"/>
+                    </a:p>
+                  </a:txBody>
+                  <a:tcPr/>
+                </a:tc>
+                <a:tc>
+                  <a:txBody>
+                    <a:bodyPr/>
+                    <a:p>
+                      <a:pPr>
+                        <a:buNone/>
+                      </a:pPr>
+                      <a:r>
+                        <a:rPr lang="en-US"/>
+                        <a:t>0.33</a:t>
+                      </a:r>
+                      <a:endParaRPr lang="en-US"/>
+                    </a:p>
+                  </a:txBody>
+                  <a:tcPr/>
+                </a:tc>
+              </a:tr>
+              <a:tr h="381000">
+                <a:tc>
+                  <a:txBody>
+                    <a:bodyPr/>
+                    <a:p>
+                      <a:pPr>
+                        <a:buNone/>
+                      </a:pPr>
+                      <a:r>
+                        <a:rPr lang="en-US" b="1">
+                          <a:solidFill>
+                            <a:srgbClr val="00B050"/>
+                          </a:solidFill>
+                          <a:latin typeface="Arial Bold" panose="020B0604020202090204" charset="0"/>
+                          <a:cs typeface="Arial Bold" panose="020B0604020202090204" charset="0"/>
+                        </a:rPr>
+                        <a:t>cats</a:t>
+                      </a:r>
+                      <a:endParaRPr lang="en-US" b="1">
+                        <a:solidFill>
+                          <a:srgbClr val="00B050"/>
+                        </a:solidFill>
+                        <a:latin typeface="Arial Bold" panose="020B0604020202090204" charset="0"/>
+                        <a:cs typeface="Arial Bold" panose="020B0604020202090204" charset="0"/>
+                      </a:endParaRPr>
+                    </a:p>
+                  </a:txBody>
+                  <a:tcPr/>
+                </a:tc>
+                <a:tc>
+                  <a:txBody>
+                    <a:bodyPr/>
+                    <a:p>
+                      <a:pPr>
+                        <a:buNone/>
+                      </a:pPr>
+                      <a:endParaRPr lang="en-US"/>
+                    </a:p>
+                  </a:txBody>
+                  <a:tcPr/>
+                </a:tc>
+                <a:tc>
+                  <a:txBody>
+                    <a:bodyPr/>
+                    <a:p>
+                      <a:pPr>
+                        <a:buNone/>
+                      </a:pPr>
+                      <a:r>
+                        <a:rPr lang="en-US"/>
+                        <a:t>1</a:t>
+                      </a:r>
+                      <a:endParaRPr lang="en-US"/>
+                    </a:p>
+                  </a:txBody>
+                  <a:tcPr/>
+                </a:tc>
+                <a:tc>
+                  <a:txBody>
+                    <a:bodyPr/>
+                    <a:p>
+                      <a:pPr>
+                        <a:buNone/>
+                      </a:pPr>
+                      <a:endParaRPr lang="en-US"/>
+                    </a:p>
+                  </a:txBody>
+                  <a:tcPr/>
+                </a:tc>
+                <a:tc>
+                  <a:txBody>
+                    <a:bodyPr/>
+                    <a:p>
+                      <a:pPr>
+                        <a:buNone/>
+                      </a:pPr>
+                      <a:endParaRPr lang="en-US"/>
+                    </a:p>
+                  </a:txBody>
+                  <a:tcPr/>
+                </a:tc>
+              </a:tr>
+              <a:tr h="381000">
+                <a:tc>
+                  <a:txBody>
+                    <a:bodyPr/>
+                    <a:p>
+                      <a:pPr>
+                        <a:buNone/>
+                      </a:pPr>
+                      <a:r>
+                        <a:rPr lang="en-US" b="1">
+                          <a:solidFill>
+                            <a:srgbClr val="00B050"/>
+                          </a:solidFill>
+                          <a:latin typeface="Arial Bold" panose="020B0604020202090204" charset="0"/>
+                          <a:cs typeface="Arial Bold" panose="020B0604020202090204" charset="0"/>
+                        </a:rPr>
+                        <a:t>dogs</a:t>
+                      </a:r>
+                      <a:endParaRPr lang="en-US" b="1">
+                        <a:solidFill>
+                          <a:srgbClr val="00B050"/>
+                        </a:solidFill>
+                        <a:latin typeface="Arial Bold" panose="020B0604020202090204" charset="0"/>
+                        <a:cs typeface="Arial Bold" panose="020B0604020202090204" charset="0"/>
+                      </a:endParaRPr>
+                    </a:p>
+                  </a:txBody>
+                  <a:tcPr/>
+                </a:tc>
+                <a:tc>
+                  <a:txBody>
+                    <a:bodyPr/>
+                    <a:p>
+                      <a:pPr>
+                        <a:buNone/>
+                      </a:pPr>
+                      <a:endParaRPr lang="en-US"/>
+                    </a:p>
+                  </a:txBody>
+                  <a:tcPr/>
+                </a:tc>
+                <a:tc>
+                  <a:txBody>
+                    <a:bodyPr/>
+                    <a:p>
+                      <a:pPr>
+                        <a:buNone/>
+                      </a:pPr>
+                      <a:r>
+                        <a:rPr lang="en-US"/>
+                        <a:t>1</a:t>
+                      </a:r>
+                      <a:endParaRPr lang="en-US"/>
+                    </a:p>
+                  </a:txBody>
+                  <a:tcPr/>
+                </a:tc>
+                <a:tc>
+                  <a:txBody>
+                    <a:bodyPr/>
+                    <a:p>
+                      <a:pPr>
+                        <a:buNone/>
+                      </a:pPr>
+                      <a:endParaRPr lang="en-US"/>
+                    </a:p>
+                  </a:txBody>
+                  <a:tcPr/>
+                </a:tc>
+                <a:tc>
+                  <a:txBody>
+                    <a:bodyPr/>
+                    <a:p>
+                      <a:pPr>
+                        <a:buNone/>
+                      </a:pPr>
+                      <a:endParaRPr lang="en-US"/>
+                    </a:p>
+                  </a:txBody>
+                  <a:tcPr/>
+                </a:tc>
+              </a:tr>
+            </a:tbl>
+          </a:graphicData>
+        </a:graphic>
+      </p:graphicFrame>
     </p:spTree>
     <p:custDataLst>
       <p:tags r:id="rId3"/>
@@ -6028,7 +6585,11 @@
                                           </p:stCondLst>
                                         </p:cTn>
                                         <p:tgtEl>
-                                          <p:spTgt spid="5"/>
+                                          <p:spTgt spid="3">
+                                            <p:txEl>
+                                              <p:pRg st="0" end="0"/>
+                                            </p:txEl>
+                                          </p:spTgt>
                                         </p:tgtEl>
                                         <p:attrNameLst>
                                           <p:attrName>style.visibility</p:attrName>
@@ -6075,7 +6636,7 @@
                                         <p:tgtEl>
                                           <p:spTgt spid="3">
                                             <p:txEl>
-                                              <p:pRg st="0" end="0"/>
+                                              <p:pRg st="1" end="1"/>
                                             </p:txEl>
                                           </p:spTgt>
                                         </p:tgtEl>
@@ -6124,7 +6685,7 @@
                                         <p:tgtEl>
                                           <p:spTgt spid="3">
                                             <p:txEl>
-                                              <p:pRg st="1" end="1"/>
+                                              <p:pRg st="2" end="2"/>
                                             </p:txEl>
                                           </p:spTgt>
                                         </p:tgtEl>
@@ -6173,7 +6734,7 @@
                                         <p:tgtEl>
                                           <p:spTgt spid="3">
                                             <p:txEl>
-                                              <p:pRg st="2" end="2"/>
+                                              <p:pRg st="3" end="3"/>
                                             </p:txEl>
                                           </p:spTgt>
                                         </p:tgtEl>
@@ -6222,7 +6783,7 @@
                                         <p:tgtEl>
                                           <p:spTgt spid="3">
                                             <p:txEl>
-                                              <p:pRg st="3" end="3"/>
+                                              <p:pRg st="4" end="4"/>
                                             </p:txEl>
                                           </p:spTgt>
                                         </p:tgtEl>
@@ -6413,7 +6974,7 @@
                                         <p:tgtEl>
                                           <p:spTgt spid="3">
                                             <p:txEl>
-                                              <p:pRg st="5" end="5"/>
+                                              <p:pRg st="6" end="6"/>
                                             </p:txEl>
                                           </p:spTgt>
                                         </p:tgtEl>
@@ -6462,7 +7023,7 @@
                                         <p:tgtEl>
                                           <p:spTgt spid="3">
                                             <p:txEl>
-                                              <p:pRg st="6" end="6"/>
+                                              <p:pRg st="7" end="7"/>
                                             </p:txEl>
                                           </p:spTgt>
                                         </p:tgtEl>
@@ -6511,7 +7072,7 @@
                                         <p:tgtEl>
                                           <p:spTgt spid="3">
                                             <p:txEl>
-                                              <p:pRg st="7" end="7"/>
+                                              <p:pRg st="8" end="8"/>
                                             </p:txEl>
                                           </p:spTgt>
                                         </p:tgtEl>
@@ -6560,7 +7121,7 @@
                                         <p:tgtEl>
                                           <p:spTgt spid="3">
                                             <p:txEl>
-                                              <p:pRg st="8" end="8"/>
+                                              <p:pRg st="9" end="9"/>
                                             </p:txEl>
                                           </p:spTgt>
                                         </p:tgtEl>
@@ -6673,10 +7234,48 @@
                   <a:txBody>
                     <a:bodyPr/>
                     <a:p>
-                      <a:pPr>
-                        <a:buNone/>
-                      </a:pPr>
-                      <a:endParaRPr lang="en-US"/>
+                      <a:pPr algn="r">
+                        <a:buNone/>
+                      </a:pPr>
+                      <a:r>
+                        <a:rPr lang="en-US" sz="1000" b="1">
+                          <a:solidFill>
+                            <a:srgbClr val="00B0F0"/>
+                          </a:solidFill>
+                          <a:latin typeface="Arial Bold" panose="020B0604020202090204" charset="0"/>
+                          <a:cs typeface="Arial Bold" panose="020B0604020202090204" charset="0"/>
+                        </a:rPr>
+                        <a:t>next word</a:t>
+                      </a:r>
+                      <a:endParaRPr lang="en-US" b="1">
+                        <a:solidFill>
+                          <a:srgbClr val="00B0F0"/>
+                        </a:solidFill>
+                        <a:latin typeface="Arial Bold" panose="020B0604020202090204" charset="0"/>
+                        <a:cs typeface="Arial Bold" panose="020B0604020202090204" charset="0"/>
+                      </a:endParaRPr>
+                    </a:p>
+                    <a:p>
+                      <a:pPr>
+                        <a:buNone/>
+                      </a:pPr>
+                      <a:r>
+                        <a:rPr lang="en-US" sz="1000" b="1">
+                          <a:solidFill>
+                            <a:srgbClr val="00B050"/>
+                          </a:solidFill>
+                          <a:latin typeface="Arial Bold" panose="020B0604020202090204" charset="0"/>
+                          <a:cs typeface="Arial Bold" panose="020B0604020202090204" charset="0"/>
+                        </a:rPr>
+                        <a:t>prev 2 words</a:t>
+                      </a:r>
+                      <a:endParaRPr lang="en-US" sz="1000" b="1">
+                        <a:solidFill>
+                          <a:srgbClr val="00B050"/>
+                        </a:solidFill>
+                        <a:latin typeface="Arial Bold" panose="020B0604020202090204" charset="0"/>
+                        <a:cs typeface="Arial Bold" panose="020B0604020202090204" charset="0"/>
+                      </a:endParaRPr>
                     </a:p>
                   </a:txBody>
                   <a:tcPr/>
@@ -6690,12 +7289,18 @@
                       </a:pPr>
                       <a:r>
                         <a:rPr lang="en-US" b="1">
+                          <a:solidFill>
+                            <a:srgbClr val="00B0F0"/>
+                          </a:solidFill>
                           <a:latin typeface="Arial Bold" panose="020B0604020202090204" charset="0"/>
                           <a:cs typeface="Arial Bold" panose="020B0604020202090204" charset="0"/>
                         </a:rPr>
                         <a:t>i</a:t>
                       </a:r>
                       <a:endParaRPr lang="en-US" b="1">
+                        <a:solidFill>
+                          <a:srgbClr val="00B0F0"/>
+                        </a:solidFill>
                         <a:latin typeface="Arial Bold" panose="020B0604020202090204" charset="0"/>
                         <a:cs typeface="Arial Bold" panose="020B0604020202090204" charset="0"/>
                       </a:endParaRPr>
@@ -6712,12 +7317,18 @@
                       </a:pPr>
                       <a:r>
                         <a:rPr lang="en-US" b="1">
+                          <a:solidFill>
+                            <a:srgbClr val="00B0F0"/>
+                          </a:solidFill>
                           <a:latin typeface="Arial Bold" panose="020B0604020202090204" charset="0"/>
                           <a:cs typeface="Arial Bold" panose="020B0604020202090204" charset="0"/>
                         </a:rPr>
                         <a:t>like</a:t>
                       </a:r>
                       <a:endParaRPr lang="en-US" b="1">
+                        <a:solidFill>
+                          <a:srgbClr val="00B0F0"/>
+                        </a:solidFill>
                         <a:latin typeface="Arial Bold" panose="020B0604020202090204" charset="0"/>
                         <a:cs typeface="Arial Bold" panose="020B0604020202090204" charset="0"/>
                       </a:endParaRPr>
@@ -6734,12 +7345,18 @@
                       </a:pPr>
                       <a:r>
                         <a:rPr lang="en-US" b="1">
+                          <a:solidFill>
+                            <a:srgbClr val="00B0F0"/>
+                          </a:solidFill>
                           <a:latin typeface="Arial Bold" panose="020B0604020202090204" charset="0"/>
                           <a:cs typeface="Arial Bold" panose="020B0604020202090204" charset="0"/>
                         </a:rPr>
                         <a:t>cats</a:t>
                       </a:r>
                       <a:endParaRPr lang="en-US" b="1">
+                        <a:solidFill>
+                          <a:srgbClr val="00B0F0"/>
+                        </a:solidFill>
                         <a:latin typeface="Arial Bold" panose="020B0604020202090204" charset="0"/>
                         <a:cs typeface="Arial Bold" panose="020B0604020202090204" charset="0"/>
                       </a:endParaRPr>
@@ -6756,12 +7373,18 @@
                       </a:pPr>
                       <a:r>
                         <a:rPr lang="en-US" b="1">
+                          <a:solidFill>
+                            <a:srgbClr val="00B0F0"/>
+                          </a:solidFill>
                           <a:latin typeface="Arial Bold" panose="020B0604020202090204" charset="0"/>
                           <a:cs typeface="Arial Bold" panose="020B0604020202090204" charset="0"/>
                         </a:rPr>
                         <a:t>dogs</a:t>
                       </a:r>
                       <a:endParaRPr lang="en-US" b="1">
+                        <a:solidFill>
+                          <a:srgbClr val="00B0F0"/>
+                        </a:solidFill>
                         <a:latin typeface="Arial Bold" panose="020B0604020202090204" charset="0"/>
                         <a:cs typeface="Arial Bold" panose="020B0604020202090204" charset="0"/>
                       </a:endParaRPr>
@@ -6780,12 +7403,18 @@
                       </a:pPr>
                       <a:r>
                         <a:rPr lang="en-US" b="1">
+                          <a:solidFill>
+                            <a:srgbClr val="00B050"/>
+                          </a:solidFill>
                           <a:latin typeface="Arial Bold" panose="020B0604020202090204" charset="0"/>
                           <a:cs typeface="Arial Bold" panose="020B0604020202090204" charset="0"/>
                         </a:rPr>
                         <a:t>i like</a:t>
                       </a:r>
                       <a:endParaRPr lang="en-US" b="1">
+                        <a:solidFill>
+                          <a:srgbClr val="00B050"/>
+                        </a:solidFill>
                         <a:latin typeface="Arial Bold" panose="020B0604020202090204" charset="0"/>
                         <a:cs typeface="Arial Bold" panose="020B0604020202090204" charset="0"/>
                       </a:endParaRPr>
@@ -6868,12 +7497,18 @@
                       </a:pPr>
                       <a:r>
                         <a:rPr lang="en-US" b="1">
+                          <a:solidFill>
+                            <a:srgbClr val="00B050"/>
+                          </a:solidFill>
                           <a:latin typeface="Arial Bold" panose="020B0604020202090204" charset="0"/>
                           <a:cs typeface="Arial Bold" panose="020B0604020202090204" charset="0"/>
                         </a:rPr>
                         <a:t>like cats</a:t>
                       </a:r>
                       <a:endParaRPr lang="en-US" b="1">
+                        <a:solidFill>
+                          <a:srgbClr val="00B050"/>
+                        </a:solidFill>
                         <a:latin typeface="Arial Bold" panose="020B0604020202090204" charset="0"/>
                         <a:cs typeface="Arial Bold" panose="020B0604020202090204" charset="0"/>
                       </a:endParaRPr>
@@ -6956,12 +7591,18 @@
                       </a:pPr>
                       <a:r>
                         <a:rPr lang="en-US" b="1">
+                          <a:solidFill>
+                            <a:srgbClr val="00B050"/>
+                          </a:solidFill>
                           <a:latin typeface="Arial Bold" panose="020B0604020202090204" charset="0"/>
                           <a:cs typeface="Arial Bold" panose="020B0604020202090204" charset="0"/>
                         </a:rPr>
                         <a:t>cats like</a:t>
                       </a:r>
                       <a:endParaRPr lang="en-US" b="1">
+                        <a:solidFill>
+                          <a:srgbClr val="00B050"/>
+                        </a:solidFill>
                         <a:latin typeface="Arial Bold" panose="020B0604020202090204" charset="0"/>
                         <a:cs typeface="Arial Bold" panose="020B0604020202090204" charset="0"/>
                       </a:endParaRPr>
@@ -7044,12 +7685,18 @@
                       </a:pPr>
                       <a:r>
                         <a:rPr lang="en-US" b="1">
+                          <a:solidFill>
+                            <a:srgbClr val="00B050"/>
+                          </a:solidFill>
                           <a:latin typeface="Arial Bold" panose="020B0604020202090204" charset="0"/>
                           <a:cs typeface="Arial Bold" panose="020B0604020202090204" charset="0"/>
                         </a:rPr>
                         <a:t>like dogs</a:t>
                       </a:r>
                       <a:endParaRPr lang="en-US" b="1">
+                        <a:solidFill>
+                          <a:srgbClr val="00B050"/>
+                        </a:solidFill>
                         <a:latin typeface="Arial Bold" panose="020B0604020202090204" charset="0"/>
                         <a:cs typeface="Arial Bold" panose="020B0604020202090204" charset="0"/>
                       </a:endParaRPr>
@@ -7132,12 +7779,18 @@
                       </a:pPr>
                       <a:r>
                         <a:rPr lang="en-US" b="1">
+                          <a:solidFill>
+                            <a:srgbClr val="00B050"/>
+                          </a:solidFill>
                           <a:latin typeface="Arial Bold" panose="020B0604020202090204" charset="0"/>
                           <a:cs typeface="Arial Bold" panose="020B0604020202090204" charset="0"/>
                         </a:rPr>
                         <a:t>dogs like</a:t>
                       </a:r>
                       <a:endParaRPr lang="en-US" b="1">
+                        <a:solidFill>
+                          <a:srgbClr val="00B050"/>
+                        </a:solidFill>
                         <a:latin typeface="Arial Bold" panose="020B0604020202090204" charset="0"/>
                         <a:cs typeface="Arial Bold" panose="020B0604020202090204" charset="0"/>
                       </a:endParaRPr>

--- a/Day4/markov/next_word_prediction.pptx
+++ b/Day4/markov/next_word_prediction.pptx
@@ -6351,7 +6351,7 @@
                       </a:pPr>
                       <a:r>
                         <a:rPr lang="en-US"/>
-                        <a:t>0.66</a:t>
+                        <a:t>0.67</a:t>
                       </a:r>
                       <a:endParaRPr lang="en-US"/>
                     </a:p>
@@ -7214,7 +7214,7 @@
         </p:nvGraphicFramePr>
         <p:xfrm>
           <a:off x="791845" y="1792605"/>
-          <a:ext cx="5438775" cy="2270760"/>
+          <a:ext cx="5438775" cy="2682240"/>
         </p:xfrm>
         <a:graphic>
           <a:graphicData uri="http://schemas.openxmlformats.org/drawingml/2006/table">
@@ -7857,6 +7857,84 @@
                         <a:rPr lang="en-US"/>
                         <a:t>...</a:t>
                       </a:r>
+                      <a:endParaRPr lang="en-US"/>
+                    </a:p>
+                  </a:txBody>
+                  <a:tcPr/>
+                </a:tc>
+              </a:tr>
+              <a:tr h="381000">
+                <a:tc>
+                  <a:txBody>
+                    <a:bodyPr/>
+                    <a:p>
+                      <a:pPr>
+                        <a:buNone/>
+                      </a:pPr>
+                      <a:r>
+                        <a:rPr lang="en-US" b="1">
+                          <a:solidFill>
+                            <a:srgbClr val="00B050"/>
+                          </a:solidFill>
+                          <a:latin typeface="Arial Bold" panose="020B0604020202090204" charset="0"/>
+                          <a:cs typeface="Arial Bold" panose="020B0604020202090204" charset="0"/>
+                        </a:rPr>
+                        <a:t>...</a:t>
+                      </a:r>
+                      <a:endParaRPr lang="en-US" b="1">
+                        <a:solidFill>
+                          <a:srgbClr val="00B050"/>
+                        </a:solidFill>
+                        <a:latin typeface="Arial Bold" panose="020B0604020202090204" charset="0"/>
+                        <a:cs typeface="Arial Bold" panose="020B0604020202090204" charset="0"/>
+                      </a:endParaRPr>
+                    </a:p>
+                  </a:txBody>
+                  <a:tcPr/>
+                </a:tc>
+                <a:tc>
+                  <a:txBody>
+                    <a:bodyPr/>
+                    <a:p>
+                      <a:pPr>
+                        <a:buNone/>
+                      </a:pPr>
+                      <a:endParaRPr lang="en-US"/>
+                    </a:p>
+                  </a:txBody>
+                  <a:tcPr/>
+                </a:tc>
+                <a:tc>
+                  <a:txBody>
+                    <a:bodyPr/>
+                    <a:p>
+                      <a:pPr>
+                        <a:buNone/>
+                      </a:pPr>
+                      <a:endParaRPr lang="en-US"/>
+                    </a:p>
+                  </a:txBody>
+                  <a:tcPr/>
+                </a:tc>
+                <a:tc>
+                  <a:txBody>
+                    <a:bodyPr/>
+                    <a:p>
+                      <a:pPr>
+                        <a:buNone/>
+                      </a:pPr>
+                      <a:endParaRPr lang="en-US"/>
+                    </a:p>
+                  </a:txBody>
+                  <a:tcPr/>
+                </a:tc>
+                <a:tc>
+                  <a:txBody>
+                    <a:bodyPr/>
+                    <a:p>
+                      <a:pPr>
+                        <a:buNone/>
+                      </a:pPr>
                       <a:endParaRPr lang="en-US"/>
                     </a:p>
                   </a:txBody>
